--- a/Data/PPT_Thi/data/11.pptx
+++ b/Data/PPT_Thi/data/11.pptx
@@ -6,12 +6,12 @@
   </p:sldMasterIdLst>
   <p:sldIdLst>
     <p:sldId id="256" r:id="rId2"/>
-    <p:sldId id="261" r:id="rId3"/>
-    <p:sldId id="262" r:id="rId4"/>
-    <p:sldId id="263" r:id="rId5"/>
-    <p:sldId id="260" r:id="rId6"/>
-    <p:sldId id="258" r:id="rId7"/>
-    <p:sldId id="257" r:id="rId8"/>
+    <p:sldId id="257" r:id="rId3"/>
+    <p:sldId id="261" r:id="rId4"/>
+    <p:sldId id="262" r:id="rId5"/>
+    <p:sldId id="263" r:id="rId6"/>
+    <p:sldId id="260" r:id="rId7"/>
+    <p:sldId id="258" r:id="rId8"/>
   </p:sldIdLst>
   <p:sldSz cx="12192000" cy="6858000"/>
   <p:notesSz cx="6858000" cy="9144000"/>
@@ -265,7 +265,7 @@
           <a:p>
             <a:fld id="{D1C9F4E3-D04A-4E30-BA68-CF0B4003FE5F}" type="datetimeFigureOut">
               <a:rPr lang="en-US" smtClean="0"/>
-              <a:t>11/13/2025</a:t>
+              <a:t>12/7/2025</a:t>
             </a:fld>
             <a:endParaRPr lang="en-US"/>
           </a:p>
@@ -463,7 +463,7 @@
           <a:p>
             <a:fld id="{D1C9F4E3-D04A-4E30-BA68-CF0B4003FE5F}" type="datetimeFigureOut">
               <a:rPr lang="en-US" smtClean="0"/>
-              <a:t>11/13/2025</a:t>
+              <a:t>12/7/2025</a:t>
             </a:fld>
             <a:endParaRPr lang="en-US"/>
           </a:p>
@@ -671,7 +671,7 @@
           <a:p>
             <a:fld id="{D1C9F4E3-D04A-4E30-BA68-CF0B4003FE5F}" type="datetimeFigureOut">
               <a:rPr lang="en-US" smtClean="0"/>
-              <a:t>11/13/2025</a:t>
+              <a:t>12/7/2025</a:t>
             </a:fld>
             <a:endParaRPr lang="en-US"/>
           </a:p>
@@ -869,7 +869,7 @@
           <a:p>
             <a:fld id="{D1C9F4E3-D04A-4E30-BA68-CF0B4003FE5F}" type="datetimeFigureOut">
               <a:rPr lang="en-US" smtClean="0"/>
-              <a:t>11/13/2025</a:t>
+              <a:t>12/7/2025</a:t>
             </a:fld>
             <a:endParaRPr lang="en-US"/>
           </a:p>
@@ -1144,7 +1144,7 @@
           <a:p>
             <a:fld id="{D1C9F4E3-D04A-4E30-BA68-CF0B4003FE5F}" type="datetimeFigureOut">
               <a:rPr lang="en-US" smtClean="0"/>
-              <a:t>11/13/2025</a:t>
+              <a:t>12/7/2025</a:t>
             </a:fld>
             <a:endParaRPr lang="en-US"/>
           </a:p>
@@ -1409,7 +1409,7 @@
           <a:p>
             <a:fld id="{D1C9F4E3-D04A-4E30-BA68-CF0B4003FE5F}" type="datetimeFigureOut">
               <a:rPr lang="en-US" smtClean="0"/>
-              <a:t>11/13/2025</a:t>
+              <a:t>12/7/2025</a:t>
             </a:fld>
             <a:endParaRPr lang="en-US"/>
           </a:p>
@@ -1821,7 +1821,7 @@
           <a:p>
             <a:fld id="{D1C9F4E3-D04A-4E30-BA68-CF0B4003FE5F}" type="datetimeFigureOut">
               <a:rPr lang="en-US" smtClean="0"/>
-              <a:t>11/13/2025</a:t>
+              <a:t>12/7/2025</a:t>
             </a:fld>
             <a:endParaRPr lang="en-US"/>
           </a:p>
@@ -1962,7 +1962,7 @@
           <a:p>
             <a:fld id="{D1C9F4E3-D04A-4E30-BA68-CF0B4003FE5F}" type="datetimeFigureOut">
               <a:rPr lang="en-US" smtClean="0"/>
-              <a:t>11/13/2025</a:t>
+              <a:t>12/7/2025</a:t>
             </a:fld>
             <a:endParaRPr lang="en-US"/>
           </a:p>
@@ -2075,7 +2075,7 @@
           <a:p>
             <a:fld id="{D1C9F4E3-D04A-4E30-BA68-CF0B4003FE5F}" type="datetimeFigureOut">
               <a:rPr lang="en-US" smtClean="0"/>
-              <a:t>11/13/2025</a:t>
+              <a:t>12/7/2025</a:t>
             </a:fld>
             <a:endParaRPr lang="en-US"/>
           </a:p>
@@ -2386,7 +2386,7 @@
           <a:p>
             <a:fld id="{D1C9F4E3-D04A-4E30-BA68-CF0B4003FE5F}" type="datetimeFigureOut">
               <a:rPr lang="en-US" smtClean="0"/>
-              <a:t>11/13/2025</a:t>
+              <a:t>12/7/2025</a:t>
             </a:fld>
             <a:endParaRPr lang="en-US"/>
           </a:p>
@@ -2674,7 +2674,7 @@
           <a:p>
             <a:fld id="{D1C9F4E3-D04A-4E30-BA68-CF0B4003FE5F}" type="datetimeFigureOut">
               <a:rPr lang="en-US" smtClean="0"/>
-              <a:t>11/13/2025</a:t>
+              <a:t>12/7/2025</a:t>
             </a:fld>
             <a:endParaRPr lang="en-US"/>
           </a:p>
@@ -2924,7 +2924,7 @@
           <a:p>
             <a:fld id="{D1C9F4E3-D04A-4E30-BA68-CF0B4003FE5F}" type="datetimeFigureOut">
               <a:rPr lang="en-US" smtClean="0"/>
-              <a:t>11/13/2025</a:t>
+              <a:t>12/7/2025</a:t>
             </a:fld>
             <a:endParaRPr lang="en-US"/>
           </a:p>
@@ -3471,639 +3471,6 @@
 </file>
 
 <file path=ppt/slides/slide2.xml><?xml version="1.0" encoding="utf-8"?>
-<p:sld xmlns:a="http://schemas.openxmlformats.org/drawingml/2006/main" xmlns:r="http://schemas.openxmlformats.org/officeDocument/2006/relationships" xmlns:p="http://schemas.openxmlformats.org/presentationml/2006/main">
-  <p:cSld>
-    <p:spTree>
-      <p:nvGrpSpPr>
-        <p:cNvPr id="1" name=""/>
-        <p:cNvGrpSpPr/>
-        <p:nvPr/>
-      </p:nvGrpSpPr>
-      <p:grpSpPr>
-        <a:xfrm>
-          <a:off x="0" y="0"/>
-          <a:ext cx="0" cy="0"/>
-          <a:chOff x="0" y="0"/>
-          <a:chExt cx="0" cy="0"/>
-        </a:xfrm>
-      </p:grpSpPr>
-      <p:sp>
-        <p:nvSpPr>
-          <p:cNvPr id="2" name="Title 1">
-            <a:extLst>
-              <a:ext uri="{FF2B5EF4-FFF2-40B4-BE49-F238E27FC236}">
-                <a16:creationId xmlns:a16="http://schemas.microsoft.com/office/drawing/2014/main" id="{28685D3B-A586-0516-2BFF-043CBACD305F}"/>
-              </a:ext>
-            </a:extLst>
-          </p:cNvPr>
-          <p:cNvSpPr>
-            <a:spLocks noGrp="1"/>
-          </p:cNvSpPr>
-          <p:nvPr>
-            <p:ph type="title"/>
-          </p:nvPr>
-        </p:nvSpPr>
-        <p:spPr/>
-        <p:txBody>
-          <a:bodyPr/>
-          <a:lstStyle/>
-          <a:p>
-            <a:endParaRPr lang="en-US"/>
-          </a:p>
-        </p:txBody>
-      </p:sp>
-      <p:sp>
-        <p:nvSpPr>
-          <p:cNvPr id="3" name="Content Placeholder 2">
-            <a:extLst>
-              <a:ext uri="{FF2B5EF4-FFF2-40B4-BE49-F238E27FC236}">
-                <a16:creationId xmlns:a16="http://schemas.microsoft.com/office/drawing/2014/main" id="{3B69B050-ACA0-5E9B-5408-F4CF1E478496}"/>
-              </a:ext>
-            </a:extLst>
-          </p:cNvPr>
-          <p:cNvSpPr>
-            <a:spLocks noGrp="1"/>
-          </p:cNvSpPr>
-          <p:nvPr>
-            <p:ph idx="1"/>
-          </p:nvPr>
-        </p:nvSpPr>
-        <p:spPr/>
-        <p:txBody>
-          <a:bodyPr/>
-          <a:lstStyle/>
-          <a:p>
-            <a:endParaRPr lang="en-US"/>
-          </a:p>
-        </p:txBody>
-      </p:sp>
-    </p:spTree>
-    <p:extLst>
-      <p:ext uri="{BB962C8B-B14F-4D97-AF65-F5344CB8AC3E}">
-        <p14:creationId xmlns:p14="http://schemas.microsoft.com/office/powerpoint/2010/main" val="631966446"/>
-      </p:ext>
-    </p:extLst>
-  </p:cSld>
-  <p:clrMapOvr>
-    <a:masterClrMapping/>
-  </p:clrMapOvr>
-</p:sld>
-</file>
-
-<file path=ppt/slides/slide3.xml><?xml version="1.0" encoding="utf-8"?>
-<p:sld xmlns:a="http://schemas.openxmlformats.org/drawingml/2006/main" xmlns:r="http://schemas.openxmlformats.org/officeDocument/2006/relationships" xmlns:p="http://schemas.openxmlformats.org/presentationml/2006/main">
-  <p:cSld>
-    <p:spTree>
-      <p:nvGrpSpPr>
-        <p:cNvPr id="1" name=""/>
-        <p:cNvGrpSpPr/>
-        <p:nvPr/>
-      </p:nvGrpSpPr>
-      <p:grpSpPr>
-        <a:xfrm>
-          <a:off x="0" y="0"/>
-          <a:ext cx="0" cy="0"/>
-          <a:chOff x="0" y="0"/>
-          <a:chExt cx="0" cy="0"/>
-        </a:xfrm>
-      </p:grpSpPr>
-      <p:sp>
-        <p:nvSpPr>
-          <p:cNvPr id="2" name="Title 1"/>
-          <p:cNvSpPr>
-            <a:spLocks noGrp="1"/>
-          </p:cNvSpPr>
-          <p:nvPr>
-            <p:ph type="title"/>
-          </p:nvPr>
-        </p:nvSpPr>
-        <p:spPr/>
-        <p:txBody>
-          <a:bodyPr/>
-          <a:lstStyle/>
-          <a:p>
-            <a:endParaRPr lang="vi-VN"/>
-          </a:p>
-        </p:txBody>
-      </p:sp>
-      <p:sp>
-        <p:nvSpPr>
-          <p:cNvPr id="3" name="Content Placeholder 2"/>
-          <p:cNvSpPr>
-            <a:spLocks noGrp="1"/>
-          </p:cNvSpPr>
-          <p:nvPr>
-            <p:ph idx="1"/>
-          </p:nvPr>
-        </p:nvSpPr>
-        <p:spPr/>
-        <p:txBody>
-          <a:bodyPr/>
-          <a:lstStyle/>
-          <a:p>
-            <a:endParaRPr lang="vi-VN"/>
-          </a:p>
-        </p:txBody>
-      </p:sp>
-    </p:spTree>
-    <p:extLst>
-      <p:ext uri="{BB962C8B-B14F-4D97-AF65-F5344CB8AC3E}">
-        <p14:creationId xmlns:p14="http://schemas.microsoft.com/office/powerpoint/2010/main" val="2264784855"/>
-      </p:ext>
-    </p:extLst>
-  </p:cSld>
-  <p:clrMapOvr>
-    <a:masterClrMapping/>
-  </p:clrMapOvr>
-</p:sld>
-</file>
-
-<file path=ppt/slides/slide4.xml><?xml version="1.0" encoding="utf-8"?>
-<p:sld xmlns:a="http://schemas.openxmlformats.org/drawingml/2006/main" xmlns:r="http://schemas.openxmlformats.org/officeDocument/2006/relationships" xmlns:p="http://schemas.openxmlformats.org/presentationml/2006/main">
-  <p:cSld>
-    <p:spTree>
-      <p:nvGrpSpPr>
-        <p:cNvPr id="1" name=""/>
-        <p:cNvGrpSpPr/>
-        <p:nvPr/>
-      </p:nvGrpSpPr>
-      <p:grpSpPr>
-        <a:xfrm>
-          <a:off x="0" y="0"/>
-          <a:ext cx="0" cy="0"/>
-          <a:chOff x="0" y="0"/>
-          <a:chExt cx="0" cy="0"/>
-        </a:xfrm>
-      </p:grpSpPr>
-      <p:sp>
-        <p:nvSpPr>
-          <p:cNvPr id="2" name="Title 1"/>
-          <p:cNvSpPr>
-            <a:spLocks noGrp="1"/>
-          </p:cNvSpPr>
-          <p:nvPr>
-            <p:ph type="title"/>
-          </p:nvPr>
-        </p:nvSpPr>
-        <p:spPr/>
-        <p:txBody>
-          <a:bodyPr/>
-          <a:lstStyle/>
-          <a:p>
-            <a:endParaRPr lang="vi-VN"/>
-          </a:p>
-        </p:txBody>
-      </p:sp>
-      <p:sp>
-        <p:nvSpPr>
-          <p:cNvPr id="3" name="Content Placeholder 2"/>
-          <p:cNvSpPr>
-            <a:spLocks noGrp="1"/>
-          </p:cNvSpPr>
-          <p:nvPr>
-            <p:ph idx="1"/>
-          </p:nvPr>
-        </p:nvSpPr>
-        <p:spPr/>
-        <p:txBody>
-          <a:bodyPr/>
-          <a:lstStyle/>
-          <a:p>
-            <a:endParaRPr lang="vi-VN"/>
-          </a:p>
-        </p:txBody>
-      </p:sp>
-    </p:spTree>
-    <p:extLst>
-      <p:ext uri="{BB962C8B-B14F-4D97-AF65-F5344CB8AC3E}">
-        <p14:creationId xmlns:p14="http://schemas.microsoft.com/office/powerpoint/2010/main" val="1635460706"/>
-      </p:ext>
-    </p:extLst>
-  </p:cSld>
-  <p:clrMapOvr>
-    <a:masterClrMapping/>
-  </p:clrMapOvr>
-</p:sld>
-</file>
-
-<file path=ppt/slides/slide5.xml><?xml version="1.0" encoding="utf-8"?>
-<p:sld xmlns:a="http://schemas.openxmlformats.org/drawingml/2006/main" xmlns:r="http://schemas.openxmlformats.org/officeDocument/2006/relationships" xmlns:p="http://schemas.openxmlformats.org/presentationml/2006/main">
-  <p:cSld>
-    <p:spTree>
-      <p:nvGrpSpPr>
-        <p:cNvPr id="1" name=""/>
-        <p:cNvGrpSpPr/>
-        <p:nvPr/>
-      </p:nvGrpSpPr>
-      <p:grpSpPr>
-        <a:xfrm>
-          <a:off x="0" y="0"/>
-          <a:ext cx="0" cy="0"/>
-          <a:chOff x="0" y="0"/>
-          <a:chExt cx="0" cy="0"/>
-        </a:xfrm>
-      </p:grpSpPr>
-      <p:sp>
-        <p:nvSpPr>
-          <p:cNvPr id="2" name="Title 1">
-            <a:extLst>
-              <a:ext uri="{FF2B5EF4-FFF2-40B4-BE49-F238E27FC236}">
-                <a16:creationId xmlns:a16="http://schemas.microsoft.com/office/drawing/2014/main" id="{ACC53C67-8169-807E-DC40-4ED05DAB3098}"/>
-              </a:ext>
-            </a:extLst>
-          </p:cNvPr>
-          <p:cNvSpPr>
-            <a:spLocks noGrp="1"/>
-          </p:cNvSpPr>
-          <p:nvPr>
-            <p:ph type="title"/>
-          </p:nvPr>
-        </p:nvSpPr>
-        <p:spPr>
-          <a:xfrm>
-            <a:off x="7448204" y="365125"/>
-            <a:ext cx="3374967" cy="2394700"/>
-          </a:xfrm>
-          <a:prstGeom prst="hexagon">
-            <a:avLst/>
-          </a:prstGeom>
-          <a:ln/>
-        </p:spPr>
-        <p:style>
-          <a:lnRef idx="2">
-            <a:schemeClr val="dk1">
-              <a:shade val="50000"/>
-            </a:schemeClr>
-          </a:lnRef>
-          <a:fillRef idx="1">
-            <a:schemeClr val="dk1"/>
-          </a:fillRef>
-          <a:effectRef idx="0">
-            <a:schemeClr val="dk1"/>
-          </a:effectRef>
-          <a:fontRef idx="minor">
-            <a:schemeClr val="lt1"/>
-          </a:fontRef>
-        </p:style>
-        <p:txBody>
-          <a:bodyPr>
-            <a:normAutofit fontScale="90000"/>
-          </a:bodyPr>
-          <a:lstStyle/>
-          <a:p>
-            <a:pPr lvl="0" algn="ctr"/>
-            <a:r>
-              <a:rPr lang="en-US" dirty="0"/>
-              <a:t>Frequent Flyer Rewards</a:t>
-            </a:r>
-          </a:p>
-        </p:txBody>
-      </p:sp>
-      <p:pic>
-        <p:nvPicPr>
-          <p:cNvPr id="1028" name="Picture 4" descr="Cách Thức Cộng Dặm - Khách Hàng Thường Xuyên | Vietnam Airlines"/>
-          <p:cNvPicPr>
-            <a:picLocks noChangeAspect="1" noChangeArrowheads="1"/>
-          </p:cNvPicPr>
-          <p:nvPr/>
-        </p:nvPicPr>
-        <p:blipFill>
-          <a:blip r:embed="rId2" cstate="print">
-            <a:extLst>
-              <a:ext uri="{28A0092B-C50C-407E-A947-70E740481C1C}">
-                <a14:useLocalDpi xmlns:a14="http://schemas.microsoft.com/office/drawing/2010/main" val="0"/>
-              </a:ext>
-            </a:extLst>
-          </a:blip>
-          <a:srcRect/>
-          <a:stretch>
-            <a:fillRect/>
-          </a:stretch>
-        </p:blipFill>
-        <p:spPr bwMode="auto">
-          <a:xfrm>
-            <a:off x="9565583" y="5641414"/>
-            <a:ext cx="2155363" cy="737134"/>
-          </a:xfrm>
-          <a:prstGeom prst="rect">
-            <a:avLst/>
-          </a:prstGeom>
-          <a:noFill/>
-          <a:extLst>
-            <a:ext uri="{909E8E84-426E-40DD-AFC4-6F175D3DCCD1}">
-              <a14:hiddenFill xmlns:a14="http://schemas.microsoft.com/office/drawing/2010/main">
-                <a:solidFill>
-                  <a:srgbClr val="FFFFFF"/>
-                </a:solidFill>
-              </a14:hiddenFill>
-            </a:ext>
-          </a:extLst>
-        </p:spPr>
-      </p:pic>
-      <p:sp>
-        <p:nvSpPr>
-          <p:cNvPr id="7" name="Content Placeholder 6"/>
-          <p:cNvSpPr>
-            <a:spLocks noGrp="1"/>
-          </p:cNvSpPr>
-          <p:nvPr>
-            <p:ph idx="1"/>
-          </p:nvPr>
-        </p:nvSpPr>
-        <p:spPr>
-          <a:xfrm>
-            <a:off x="838200" y="1825625"/>
-            <a:ext cx="6610004" cy="2912630"/>
-          </a:xfrm>
-          <a:prstGeom prst="cloudCallout">
-            <a:avLst/>
-          </a:prstGeom>
-        </p:spPr>
-        <p:style>
-          <a:lnRef idx="2">
-            <a:schemeClr val="accent1">
-              <a:shade val="50000"/>
-            </a:schemeClr>
-          </a:lnRef>
-          <a:fillRef idx="1">
-            <a:schemeClr val="accent1"/>
-          </a:fillRef>
-          <a:effectRef idx="0">
-            <a:schemeClr val="accent1"/>
-          </a:effectRef>
-          <a:fontRef idx="minor">
-            <a:schemeClr val="lt1"/>
-          </a:fontRef>
-        </p:style>
-        <p:txBody>
-          <a:bodyPr rtlCol="0" anchor="ctr"/>
-          <a:lstStyle/>
-          <a:p>
-            <a:endParaRPr lang="vi-VN"/>
-          </a:p>
-        </p:txBody>
-      </p:sp>
-    </p:spTree>
-    <p:extLst>
-      <p:ext uri="{BB962C8B-B14F-4D97-AF65-F5344CB8AC3E}">
-        <p14:creationId xmlns:p14="http://schemas.microsoft.com/office/powerpoint/2010/main" val="1672337725"/>
-      </p:ext>
-    </p:extLst>
-  </p:cSld>
-  <p:clrMapOvr>
-    <a:masterClrMapping/>
-  </p:clrMapOvr>
-</p:sld>
-</file>
-
-<file path=ppt/slides/slide6.xml><?xml version="1.0" encoding="utf-8"?>
-<p:sld xmlns:a="http://schemas.openxmlformats.org/drawingml/2006/main" xmlns:r="http://schemas.openxmlformats.org/officeDocument/2006/relationships" xmlns:p="http://schemas.openxmlformats.org/presentationml/2006/main">
-  <p:cSld>
-    <p:spTree>
-      <p:nvGrpSpPr>
-        <p:cNvPr id="1" name=""/>
-        <p:cNvGrpSpPr/>
-        <p:nvPr/>
-      </p:nvGrpSpPr>
-      <p:grpSpPr>
-        <a:xfrm>
-          <a:off x="0" y="0"/>
-          <a:ext cx="0" cy="0"/>
-          <a:chOff x="0" y="0"/>
-          <a:chExt cx="0" cy="0"/>
-        </a:xfrm>
-      </p:grpSpPr>
-      <p:sp>
-        <p:nvSpPr>
-          <p:cNvPr id="2" name="Title 1">
-            <a:extLst>
-              <a:ext uri="{FF2B5EF4-FFF2-40B4-BE49-F238E27FC236}">
-                <a16:creationId xmlns:a16="http://schemas.microsoft.com/office/drawing/2014/main" id="{DC93D0B4-1172-7444-411D-1981DBB3D3E6}"/>
-              </a:ext>
-            </a:extLst>
-          </p:cNvPr>
-          <p:cNvSpPr>
-            <a:spLocks noGrp="1"/>
-          </p:cNvSpPr>
-          <p:nvPr>
-            <p:ph type="title"/>
-          </p:nvPr>
-        </p:nvSpPr>
-        <p:spPr/>
-        <p:txBody>
-          <a:bodyPr/>
-          <a:lstStyle/>
-          <a:p>
-            <a:r>
-              <a:rPr lang="en-US" dirty="0"/>
-              <a:t>Become a Frequent Flyer</a:t>
-            </a:r>
-          </a:p>
-        </p:txBody>
-      </p:sp>
-      <p:sp>
-        <p:nvSpPr>
-          <p:cNvPr id="3" name="Content Placeholder 2">
-            <a:extLst>
-              <a:ext uri="{FF2B5EF4-FFF2-40B4-BE49-F238E27FC236}">
-                <a16:creationId xmlns:a16="http://schemas.microsoft.com/office/drawing/2014/main" id="{0F0A4270-2254-871C-5363-4194CA2A6226}"/>
-              </a:ext>
-            </a:extLst>
-          </p:cNvPr>
-          <p:cNvSpPr>
-            <a:spLocks noGrp="1"/>
-          </p:cNvSpPr>
-          <p:nvPr>
-            <p:ph idx="1"/>
-          </p:nvPr>
-        </p:nvSpPr>
-        <p:spPr>
-          <a:xfrm>
-            <a:off x="838200" y="1457678"/>
-            <a:ext cx="4388556" cy="466019"/>
-          </a:xfrm>
-        </p:spPr>
-        <p:txBody>
-          <a:bodyPr>
-            <a:normAutofit lnSpcReduction="10000"/>
-          </a:bodyPr>
-          <a:lstStyle/>
-          <a:p>
-            <a:pPr marL="0" indent="0">
-              <a:buNone/>
-            </a:pPr>
-            <a:r>
-              <a:rPr lang="en-US" dirty="0"/>
-              <a:t>Registration is easy and fast</a:t>
-            </a:r>
-          </a:p>
-        </p:txBody>
-      </p:sp>
-      <p:sp>
-        <p:nvSpPr>
-          <p:cNvPr id="4" name="Cloud 3">
-            <a:extLst>
-              <a:ext uri="{FF2B5EF4-FFF2-40B4-BE49-F238E27FC236}">
-                <a16:creationId xmlns:a16="http://schemas.microsoft.com/office/drawing/2014/main" id="{FBAF7DF1-9027-AF36-7082-1644A4250A15}"/>
-              </a:ext>
-            </a:extLst>
-          </p:cNvPr>
-          <p:cNvSpPr/>
-          <p:nvPr/>
-        </p:nvSpPr>
-        <p:spPr>
-          <a:xfrm>
-            <a:off x="838200" y="2348088"/>
-            <a:ext cx="5303520" cy="1828800"/>
-          </a:xfrm>
-          <a:prstGeom prst="cloud">
-            <a:avLst/>
-          </a:prstGeom>
-        </p:spPr>
-        <p:style>
-          <a:lnRef idx="2">
-            <a:schemeClr val="accent1"/>
-          </a:lnRef>
-          <a:fillRef idx="1">
-            <a:schemeClr val="lt1"/>
-          </a:fillRef>
-          <a:effectRef idx="0">
-            <a:schemeClr val="accent1"/>
-          </a:effectRef>
-          <a:fontRef idx="minor">
-            <a:schemeClr val="dk1"/>
-          </a:fontRef>
-        </p:style>
-        <p:txBody>
-          <a:bodyPr rtlCol="0" anchor="ctr"/>
-          <a:lstStyle/>
-          <a:p>
-            <a:pPr algn="ctr"/>
-            <a:r>
-              <a:rPr lang="en-US" dirty="0"/>
-              <a:t>Register for the program at </a:t>
-            </a:r>
-            <a:r>
-              <a:rPr lang="en-US" dirty="0">
-                <a:hlinkClick r:id="rId2"/>
-              </a:rPr>
-              <a:t>www.blueyonderairlines.com</a:t>
-            </a:r>
-            <a:r>
-              <a:rPr lang="en-US" dirty="0"/>
-              <a:t> </a:t>
-            </a:r>
-          </a:p>
-        </p:txBody>
-      </p:sp>
-      <p:sp>
-        <p:nvSpPr>
-          <p:cNvPr id="8" name="Cloud 7">
-            <a:extLst>
-              <a:ext uri="{FF2B5EF4-FFF2-40B4-BE49-F238E27FC236}">
-                <a16:creationId xmlns:a16="http://schemas.microsoft.com/office/drawing/2014/main" id="{B40F1916-3DE3-8EEC-A88B-77D73416552F}"/>
-              </a:ext>
-            </a:extLst>
-          </p:cNvPr>
-          <p:cNvSpPr/>
-          <p:nvPr/>
-        </p:nvSpPr>
-        <p:spPr>
-          <a:xfrm>
-            <a:off x="3567289" y="3429000"/>
-            <a:ext cx="5303520" cy="1828800"/>
-          </a:xfrm>
-          <a:prstGeom prst="cloud">
-            <a:avLst/>
-          </a:prstGeom>
-        </p:spPr>
-        <p:style>
-          <a:lnRef idx="2">
-            <a:schemeClr val="accent1"/>
-          </a:lnRef>
-          <a:fillRef idx="1">
-            <a:schemeClr val="lt1"/>
-          </a:fillRef>
-          <a:effectRef idx="0">
-            <a:schemeClr val="accent1"/>
-          </a:effectRef>
-          <a:fontRef idx="minor">
-            <a:schemeClr val="dk1"/>
-          </a:fontRef>
-        </p:style>
-        <p:txBody>
-          <a:bodyPr rtlCol="0" anchor="ctr"/>
-          <a:lstStyle/>
-          <a:p>
-            <a:pPr algn="ctr"/>
-            <a:r>
-              <a:rPr lang="en-US" dirty="0"/>
-              <a:t>Connect your frequent flyer number to your purchases</a:t>
-            </a:r>
-          </a:p>
-        </p:txBody>
-      </p:sp>
-      <p:sp>
-        <p:nvSpPr>
-          <p:cNvPr id="9" name="Cloud 8">
-            <a:extLst>
-              <a:ext uri="{FF2B5EF4-FFF2-40B4-BE49-F238E27FC236}">
-                <a16:creationId xmlns:a16="http://schemas.microsoft.com/office/drawing/2014/main" id="{C4CE8388-81B7-5452-9F34-5F7588290934}"/>
-              </a:ext>
-            </a:extLst>
-          </p:cNvPr>
-          <p:cNvSpPr/>
-          <p:nvPr/>
-        </p:nvSpPr>
-        <p:spPr>
-          <a:xfrm>
-            <a:off x="6461760" y="4590345"/>
-            <a:ext cx="3431822" cy="1334910"/>
-          </a:xfrm>
-          <a:prstGeom prst="cloud">
-            <a:avLst/>
-          </a:prstGeom>
-        </p:spPr>
-        <p:style>
-          <a:lnRef idx="2">
-            <a:schemeClr val="accent1"/>
-          </a:lnRef>
-          <a:fillRef idx="1">
-            <a:schemeClr val="lt1"/>
-          </a:fillRef>
-          <a:effectRef idx="0">
-            <a:schemeClr val="accent1"/>
-          </a:effectRef>
-          <a:fontRef idx="minor">
-            <a:schemeClr val="dk1"/>
-          </a:fontRef>
-        </p:style>
-        <p:txBody>
-          <a:bodyPr rtlCol="0" anchor="ctr"/>
-          <a:lstStyle/>
-          <a:p>
-            <a:pPr algn="ctr"/>
-            <a:r>
-              <a:rPr lang="en-US" dirty="0"/>
-              <a:t>Accumulate points and use them for your future trips</a:t>
-            </a:r>
-          </a:p>
-        </p:txBody>
-      </p:sp>
-    </p:spTree>
-    <p:extLst>
-      <p:ext uri="{BB962C8B-B14F-4D97-AF65-F5344CB8AC3E}">
-        <p14:creationId xmlns:p14="http://schemas.microsoft.com/office/powerpoint/2010/main" val="4246887344"/>
-      </p:ext>
-    </p:extLst>
-  </p:cSld>
-  <p:clrMapOvr>
-    <a:masterClrMapping/>
-  </p:clrMapOvr>
-</p:sld>
-</file>
-
-<file path=ppt/slides/slide7.xml><?xml version="1.0" encoding="utf-8"?>
 <p:sld xmlns:a="http://schemas.openxmlformats.org/drawingml/2006/main" xmlns:r="http://schemas.openxmlformats.org/officeDocument/2006/relationships" xmlns:p="http://schemas.openxmlformats.org/presentationml/2006/main">
   <p:cSld>
     <p:spTree>
@@ -4548,6 +3915,639 @@
 </p:sld>
 </file>
 
+<file path=ppt/slides/slide3.xml><?xml version="1.0" encoding="utf-8"?>
+<p:sld xmlns:a="http://schemas.openxmlformats.org/drawingml/2006/main" xmlns:r="http://schemas.openxmlformats.org/officeDocument/2006/relationships" xmlns:p="http://schemas.openxmlformats.org/presentationml/2006/main">
+  <p:cSld>
+    <p:spTree>
+      <p:nvGrpSpPr>
+        <p:cNvPr id="1" name=""/>
+        <p:cNvGrpSpPr/>
+        <p:nvPr/>
+      </p:nvGrpSpPr>
+      <p:grpSpPr>
+        <a:xfrm>
+          <a:off x="0" y="0"/>
+          <a:ext cx="0" cy="0"/>
+          <a:chOff x="0" y="0"/>
+          <a:chExt cx="0" cy="0"/>
+        </a:xfrm>
+      </p:grpSpPr>
+      <p:sp>
+        <p:nvSpPr>
+          <p:cNvPr id="2" name="Title 1">
+            <a:extLst>
+              <a:ext uri="{FF2B5EF4-FFF2-40B4-BE49-F238E27FC236}">
+                <a16:creationId xmlns:a16="http://schemas.microsoft.com/office/drawing/2014/main" id="{28685D3B-A586-0516-2BFF-043CBACD305F}"/>
+              </a:ext>
+            </a:extLst>
+          </p:cNvPr>
+          <p:cNvSpPr>
+            <a:spLocks noGrp="1"/>
+          </p:cNvSpPr>
+          <p:nvPr>
+            <p:ph type="title"/>
+          </p:nvPr>
+        </p:nvSpPr>
+        <p:spPr/>
+        <p:txBody>
+          <a:bodyPr/>
+          <a:lstStyle/>
+          <a:p>
+            <a:endParaRPr lang="en-US"/>
+          </a:p>
+        </p:txBody>
+      </p:sp>
+      <p:sp>
+        <p:nvSpPr>
+          <p:cNvPr id="3" name="Content Placeholder 2">
+            <a:extLst>
+              <a:ext uri="{FF2B5EF4-FFF2-40B4-BE49-F238E27FC236}">
+                <a16:creationId xmlns:a16="http://schemas.microsoft.com/office/drawing/2014/main" id="{3B69B050-ACA0-5E9B-5408-F4CF1E478496}"/>
+              </a:ext>
+            </a:extLst>
+          </p:cNvPr>
+          <p:cNvSpPr>
+            <a:spLocks noGrp="1"/>
+          </p:cNvSpPr>
+          <p:nvPr>
+            <p:ph idx="1"/>
+          </p:nvPr>
+        </p:nvSpPr>
+        <p:spPr/>
+        <p:txBody>
+          <a:bodyPr/>
+          <a:lstStyle/>
+          <a:p>
+            <a:endParaRPr lang="en-US"/>
+          </a:p>
+        </p:txBody>
+      </p:sp>
+    </p:spTree>
+    <p:extLst>
+      <p:ext uri="{BB962C8B-B14F-4D97-AF65-F5344CB8AC3E}">
+        <p14:creationId xmlns:p14="http://schemas.microsoft.com/office/powerpoint/2010/main" val="631966446"/>
+      </p:ext>
+    </p:extLst>
+  </p:cSld>
+  <p:clrMapOvr>
+    <a:masterClrMapping/>
+  </p:clrMapOvr>
+</p:sld>
+</file>
+
+<file path=ppt/slides/slide4.xml><?xml version="1.0" encoding="utf-8"?>
+<p:sld xmlns:a="http://schemas.openxmlformats.org/drawingml/2006/main" xmlns:r="http://schemas.openxmlformats.org/officeDocument/2006/relationships" xmlns:p="http://schemas.openxmlformats.org/presentationml/2006/main">
+  <p:cSld>
+    <p:spTree>
+      <p:nvGrpSpPr>
+        <p:cNvPr id="1" name=""/>
+        <p:cNvGrpSpPr/>
+        <p:nvPr/>
+      </p:nvGrpSpPr>
+      <p:grpSpPr>
+        <a:xfrm>
+          <a:off x="0" y="0"/>
+          <a:ext cx="0" cy="0"/>
+          <a:chOff x="0" y="0"/>
+          <a:chExt cx="0" cy="0"/>
+        </a:xfrm>
+      </p:grpSpPr>
+      <p:sp>
+        <p:nvSpPr>
+          <p:cNvPr id="2" name="Title 1"/>
+          <p:cNvSpPr>
+            <a:spLocks noGrp="1"/>
+          </p:cNvSpPr>
+          <p:nvPr>
+            <p:ph type="title"/>
+          </p:nvPr>
+        </p:nvSpPr>
+        <p:spPr/>
+        <p:txBody>
+          <a:bodyPr/>
+          <a:lstStyle/>
+          <a:p>
+            <a:endParaRPr lang="vi-VN"/>
+          </a:p>
+        </p:txBody>
+      </p:sp>
+      <p:sp>
+        <p:nvSpPr>
+          <p:cNvPr id="3" name="Content Placeholder 2"/>
+          <p:cNvSpPr>
+            <a:spLocks noGrp="1"/>
+          </p:cNvSpPr>
+          <p:nvPr>
+            <p:ph idx="1"/>
+          </p:nvPr>
+        </p:nvSpPr>
+        <p:spPr/>
+        <p:txBody>
+          <a:bodyPr/>
+          <a:lstStyle/>
+          <a:p>
+            <a:endParaRPr lang="vi-VN"/>
+          </a:p>
+        </p:txBody>
+      </p:sp>
+    </p:spTree>
+    <p:extLst>
+      <p:ext uri="{BB962C8B-B14F-4D97-AF65-F5344CB8AC3E}">
+        <p14:creationId xmlns:p14="http://schemas.microsoft.com/office/powerpoint/2010/main" val="2264784855"/>
+      </p:ext>
+    </p:extLst>
+  </p:cSld>
+  <p:clrMapOvr>
+    <a:masterClrMapping/>
+  </p:clrMapOvr>
+</p:sld>
+</file>
+
+<file path=ppt/slides/slide5.xml><?xml version="1.0" encoding="utf-8"?>
+<p:sld xmlns:a="http://schemas.openxmlformats.org/drawingml/2006/main" xmlns:r="http://schemas.openxmlformats.org/officeDocument/2006/relationships" xmlns:p="http://schemas.openxmlformats.org/presentationml/2006/main">
+  <p:cSld>
+    <p:spTree>
+      <p:nvGrpSpPr>
+        <p:cNvPr id="1" name=""/>
+        <p:cNvGrpSpPr/>
+        <p:nvPr/>
+      </p:nvGrpSpPr>
+      <p:grpSpPr>
+        <a:xfrm>
+          <a:off x="0" y="0"/>
+          <a:ext cx="0" cy="0"/>
+          <a:chOff x="0" y="0"/>
+          <a:chExt cx="0" cy="0"/>
+        </a:xfrm>
+      </p:grpSpPr>
+      <p:sp>
+        <p:nvSpPr>
+          <p:cNvPr id="2" name="Title 1"/>
+          <p:cNvSpPr>
+            <a:spLocks noGrp="1"/>
+          </p:cNvSpPr>
+          <p:nvPr>
+            <p:ph type="title"/>
+          </p:nvPr>
+        </p:nvSpPr>
+        <p:spPr/>
+        <p:txBody>
+          <a:bodyPr/>
+          <a:lstStyle/>
+          <a:p>
+            <a:endParaRPr lang="vi-VN"/>
+          </a:p>
+        </p:txBody>
+      </p:sp>
+      <p:sp>
+        <p:nvSpPr>
+          <p:cNvPr id="3" name="Content Placeholder 2"/>
+          <p:cNvSpPr>
+            <a:spLocks noGrp="1"/>
+          </p:cNvSpPr>
+          <p:nvPr>
+            <p:ph idx="1"/>
+          </p:nvPr>
+        </p:nvSpPr>
+        <p:spPr/>
+        <p:txBody>
+          <a:bodyPr/>
+          <a:lstStyle/>
+          <a:p>
+            <a:endParaRPr lang="vi-VN"/>
+          </a:p>
+        </p:txBody>
+      </p:sp>
+    </p:spTree>
+    <p:extLst>
+      <p:ext uri="{BB962C8B-B14F-4D97-AF65-F5344CB8AC3E}">
+        <p14:creationId xmlns:p14="http://schemas.microsoft.com/office/powerpoint/2010/main" val="1635460706"/>
+      </p:ext>
+    </p:extLst>
+  </p:cSld>
+  <p:clrMapOvr>
+    <a:masterClrMapping/>
+  </p:clrMapOvr>
+</p:sld>
+</file>
+
+<file path=ppt/slides/slide6.xml><?xml version="1.0" encoding="utf-8"?>
+<p:sld xmlns:a="http://schemas.openxmlformats.org/drawingml/2006/main" xmlns:r="http://schemas.openxmlformats.org/officeDocument/2006/relationships" xmlns:p="http://schemas.openxmlformats.org/presentationml/2006/main">
+  <p:cSld>
+    <p:spTree>
+      <p:nvGrpSpPr>
+        <p:cNvPr id="1" name=""/>
+        <p:cNvGrpSpPr/>
+        <p:nvPr/>
+      </p:nvGrpSpPr>
+      <p:grpSpPr>
+        <a:xfrm>
+          <a:off x="0" y="0"/>
+          <a:ext cx="0" cy="0"/>
+          <a:chOff x="0" y="0"/>
+          <a:chExt cx="0" cy="0"/>
+        </a:xfrm>
+      </p:grpSpPr>
+      <p:sp>
+        <p:nvSpPr>
+          <p:cNvPr id="2" name="Title 1">
+            <a:extLst>
+              <a:ext uri="{FF2B5EF4-FFF2-40B4-BE49-F238E27FC236}">
+                <a16:creationId xmlns:a16="http://schemas.microsoft.com/office/drawing/2014/main" id="{ACC53C67-8169-807E-DC40-4ED05DAB3098}"/>
+              </a:ext>
+            </a:extLst>
+          </p:cNvPr>
+          <p:cNvSpPr>
+            <a:spLocks noGrp="1"/>
+          </p:cNvSpPr>
+          <p:nvPr>
+            <p:ph type="title"/>
+          </p:nvPr>
+        </p:nvSpPr>
+        <p:spPr>
+          <a:xfrm>
+            <a:off x="7448204" y="365125"/>
+            <a:ext cx="3374967" cy="2394700"/>
+          </a:xfrm>
+          <a:prstGeom prst="hexagon">
+            <a:avLst/>
+          </a:prstGeom>
+          <a:ln/>
+        </p:spPr>
+        <p:style>
+          <a:lnRef idx="2">
+            <a:schemeClr val="dk1">
+              <a:shade val="50000"/>
+            </a:schemeClr>
+          </a:lnRef>
+          <a:fillRef idx="1">
+            <a:schemeClr val="dk1"/>
+          </a:fillRef>
+          <a:effectRef idx="0">
+            <a:schemeClr val="dk1"/>
+          </a:effectRef>
+          <a:fontRef idx="minor">
+            <a:schemeClr val="lt1"/>
+          </a:fontRef>
+        </p:style>
+        <p:txBody>
+          <a:bodyPr>
+            <a:normAutofit fontScale="90000"/>
+          </a:bodyPr>
+          <a:lstStyle/>
+          <a:p>
+            <a:pPr lvl="0" algn="ctr"/>
+            <a:r>
+              <a:rPr lang="en-US" dirty="0"/>
+              <a:t>Frequent Flyer Rewards</a:t>
+            </a:r>
+          </a:p>
+        </p:txBody>
+      </p:sp>
+      <p:pic>
+        <p:nvPicPr>
+          <p:cNvPr id="1028" name="Picture 4" descr="Cách Thức Cộng Dặm - Khách Hàng Thường Xuyên | Vietnam Airlines"/>
+          <p:cNvPicPr>
+            <a:picLocks noChangeAspect="1" noChangeArrowheads="1"/>
+          </p:cNvPicPr>
+          <p:nvPr/>
+        </p:nvPicPr>
+        <p:blipFill>
+          <a:blip r:embed="rId2" cstate="print">
+            <a:extLst>
+              <a:ext uri="{28A0092B-C50C-407E-A947-70E740481C1C}">
+                <a14:useLocalDpi xmlns:a14="http://schemas.microsoft.com/office/drawing/2010/main" val="0"/>
+              </a:ext>
+            </a:extLst>
+          </a:blip>
+          <a:srcRect/>
+          <a:stretch>
+            <a:fillRect/>
+          </a:stretch>
+        </p:blipFill>
+        <p:spPr bwMode="auto">
+          <a:xfrm>
+            <a:off x="9565583" y="5641414"/>
+            <a:ext cx="2155363" cy="737134"/>
+          </a:xfrm>
+          <a:prstGeom prst="rect">
+            <a:avLst/>
+          </a:prstGeom>
+          <a:noFill/>
+          <a:extLst>
+            <a:ext uri="{909E8E84-426E-40DD-AFC4-6F175D3DCCD1}">
+              <a14:hiddenFill xmlns:a14="http://schemas.microsoft.com/office/drawing/2010/main">
+                <a:solidFill>
+                  <a:srgbClr val="FFFFFF"/>
+                </a:solidFill>
+              </a14:hiddenFill>
+            </a:ext>
+          </a:extLst>
+        </p:spPr>
+      </p:pic>
+      <p:sp>
+        <p:nvSpPr>
+          <p:cNvPr id="7" name="Content Placeholder 6"/>
+          <p:cNvSpPr>
+            <a:spLocks noGrp="1"/>
+          </p:cNvSpPr>
+          <p:nvPr>
+            <p:ph idx="1"/>
+          </p:nvPr>
+        </p:nvSpPr>
+        <p:spPr>
+          <a:xfrm>
+            <a:off x="838200" y="1825625"/>
+            <a:ext cx="6610004" cy="2912630"/>
+          </a:xfrm>
+          <a:prstGeom prst="cloudCallout">
+            <a:avLst/>
+          </a:prstGeom>
+        </p:spPr>
+        <p:style>
+          <a:lnRef idx="2">
+            <a:schemeClr val="accent1">
+              <a:shade val="50000"/>
+            </a:schemeClr>
+          </a:lnRef>
+          <a:fillRef idx="1">
+            <a:schemeClr val="accent1"/>
+          </a:fillRef>
+          <a:effectRef idx="0">
+            <a:schemeClr val="accent1"/>
+          </a:effectRef>
+          <a:fontRef idx="minor">
+            <a:schemeClr val="lt1"/>
+          </a:fontRef>
+        </p:style>
+        <p:txBody>
+          <a:bodyPr rtlCol="0" anchor="ctr"/>
+          <a:lstStyle/>
+          <a:p>
+            <a:endParaRPr lang="vi-VN"/>
+          </a:p>
+        </p:txBody>
+      </p:sp>
+    </p:spTree>
+    <p:extLst>
+      <p:ext uri="{BB962C8B-B14F-4D97-AF65-F5344CB8AC3E}">
+        <p14:creationId xmlns:p14="http://schemas.microsoft.com/office/powerpoint/2010/main" val="1672337725"/>
+      </p:ext>
+    </p:extLst>
+  </p:cSld>
+  <p:clrMapOvr>
+    <a:masterClrMapping/>
+  </p:clrMapOvr>
+</p:sld>
+</file>
+
+<file path=ppt/slides/slide7.xml><?xml version="1.0" encoding="utf-8"?>
+<p:sld xmlns:a="http://schemas.openxmlformats.org/drawingml/2006/main" xmlns:r="http://schemas.openxmlformats.org/officeDocument/2006/relationships" xmlns:p="http://schemas.openxmlformats.org/presentationml/2006/main">
+  <p:cSld>
+    <p:spTree>
+      <p:nvGrpSpPr>
+        <p:cNvPr id="1" name=""/>
+        <p:cNvGrpSpPr/>
+        <p:nvPr/>
+      </p:nvGrpSpPr>
+      <p:grpSpPr>
+        <a:xfrm>
+          <a:off x="0" y="0"/>
+          <a:ext cx="0" cy="0"/>
+          <a:chOff x="0" y="0"/>
+          <a:chExt cx="0" cy="0"/>
+        </a:xfrm>
+      </p:grpSpPr>
+      <p:sp>
+        <p:nvSpPr>
+          <p:cNvPr id="2" name="Title 1">
+            <a:extLst>
+              <a:ext uri="{FF2B5EF4-FFF2-40B4-BE49-F238E27FC236}">
+                <a16:creationId xmlns:a16="http://schemas.microsoft.com/office/drawing/2014/main" id="{DC93D0B4-1172-7444-411D-1981DBB3D3E6}"/>
+              </a:ext>
+            </a:extLst>
+          </p:cNvPr>
+          <p:cNvSpPr>
+            <a:spLocks noGrp="1"/>
+          </p:cNvSpPr>
+          <p:nvPr>
+            <p:ph type="title"/>
+          </p:nvPr>
+        </p:nvSpPr>
+        <p:spPr/>
+        <p:txBody>
+          <a:bodyPr/>
+          <a:lstStyle/>
+          <a:p>
+            <a:r>
+              <a:rPr lang="en-US" dirty="0"/>
+              <a:t>Become a Frequent Flyer</a:t>
+            </a:r>
+          </a:p>
+        </p:txBody>
+      </p:sp>
+      <p:sp>
+        <p:nvSpPr>
+          <p:cNvPr id="3" name="Content Placeholder 2">
+            <a:extLst>
+              <a:ext uri="{FF2B5EF4-FFF2-40B4-BE49-F238E27FC236}">
+                <a16:creationId xmlns:a16="http://schemas.microsoft.com/office/drawing/2014/main" id="{0F0A4270-2254-871C-5363-4194CA2A6226}"/>
+              </a:ext>
+            </a:extLst>
+          </p:cNvPr>
+          <p:cNvSpPr>
+            <a:spLocks noGrp="1"/>
+          </p:cNvSpPr>
+          <p:nvPr>
+            <p:ph idx="1"/>
+          </p:nvPr>
+        </p:nvSpPr>
+        <p:spPr>
+          <a:xfrm>
+            <a:off x="838200" y="1457678"/>
+            <a:ext cx="4388556" cy="466019"/>
+          </a:xfrm>
+        </p:spPr>
+        <p:txBody>
+          <a:bodyPr>
+            <a:normAutofit lnSpcReduction="10000"/>
+          </a:bodyPr>
+          <a:lstStyle/>
+          <a:p>
+            <a:pPr marL="0" indent="0">
+              <a:buNone/>
+            </a:pPr>
+            <a:r>
+              <a:rPr lang="en-US" dirty="0"/>
+              <a:t>Registration is easy and fast</a:t>
+            </a:r>
+          </a:p>
+        </p:txBody>
+      </p:sp>
+      <p:sp>
+        <p:nvSpPr>
+          <p:cNvPr id="4" name="Cloud 3">
+            <a:extLst>
+              <a:ext uri="{FF2B5EF4-FFF2-40B4-BE49-F238E27FC236}">
+                <a16:creationId xmlns:a16="http://schemas.microsoft.com/office/drawing/2014/main" id="{FBAF7DF1-9027-AF36-7082-1644A4250A15}"/>
+              </a:ext>
+            </a:extLst>
+          </p:cNvPr>
+          <p:cNvSpPr/>
+          <p:nvPr/>
+        </p:nvSpPr>
+        <p:spPr>
+          <a:xfrm>
+            <a:off x="838200" y="2348088"/>
+            <a:ext cx="5303520" cy="1828800"/>
+          </a:xfrm>
+          <a:prstGeom prst="cloud">
+            <a:avLst/>
+          </a:prstGeom>
+        </p:spPr>
+        <p:style>
+          <a:lnRef idx="2">
+            <a:schemeClr val="accent1"/>
+          </a:lnRef>
+          <a:fillRef idx="1">
+            <a:schemeClr val="lt1"/>
+          </a:fillRef>
+          <a:effectRef idx="0">
+            <a:schemeClr val="accent1"/>
+          </a:effectRef>
+          <a:fontRef idx="minor">
+            <a:schemeClr val="dk1"/>
+          </a:fontRef>
+        </p:style>
+        <p:txBody>
+          <a:bodyPr rtlCol="0" anchor="ctr"/>
+          <a:lstStyle/>
+          <a:p>
+            <a:pPr algn="ctr"/>
+            <a:r>
+              <a:rPr lang="en-US" dirty="0"/>
+              <a:t>Register for the program at </a:t>
+            </a:r>
+            <a:r>
+              <a:rPr lang="en-US" dirty="0">
+                <a:hlinkClick r:id="rId2"/>
+              </a:rPr>
+              <a:t>www.blueyonderairlines.com</a:t>
+            </a:r>
+            <a:r>
+              <a:rPr lang="en-US" dirty="0"/>
+              <a:t> </a:t>
+            </a:r>
+          </a:p>
+        </p:txBody>
+      </p:sp>
+      <p:sp>
+        <p:nvSpPr>
+          <p:cNvPr id="8" name="Cloud 7">
+            <a:extLst>
+              <a:ext uri="{FF2B5EF4-FFF2-40B4-BE49-F238E27FC236}">
+                <a16:creationId xmlns:a16="http://schemas.microsoft.com/office/drawing/2014/main" id="{B40F1916-3DE3-8EEC-A88B-77D73416552F}"/>
+              </a:ext>
+            </a:extLst>
+          </p:cNvPr>
+          <p:cNvSpPr/>
+          <p:nvPr/>
+        </p:nvSpPr>
+        <p:spPr>
+          <a:xfrm>
+            <a:off x="3567289" y="3429000"/>
+            <a:ext cx="5303520" cy="1828800"/>
+          </a:xfrm>
+          <a:prstGeom prst="cloud">
+            <a:avLst/>
+          </a:prstGeom>
+        </p:spPr>
+        <p:style>
+          <a:lnRef idx="2">
+            <a:schemeClr val="accent1"/>
+          </a:lnRef>
+          <a:fillRef idx="1">
+            <a:schemeClr val="lt1"/>
+          </a:fillRef>
+          <a:effectRef idx="0">
+            <a:schemeClr val="accent1"/>
+          </a:effectRef>
+          <a:fontRef idx="minor">
+            <a:schemeClr val="dk1"/>
+          </a:fontRef>
+        </p:style>
+        <p:txBody>
+          <a:bodyPr rtlCol="0" anchor="ctr"/>
+          <a:lstStyle/>
+          <a:p>
+            <a:pPr algn="ctr"/>
+            <a:r>
+              <a:rPr lang="en-US" dirty="0"/>
+              <a:t>Connect your frequent flyer number to your purchases</a:t>
+            </a:r>
+          </a:p>
+        </p:txBody>
+      </p:sp>
+      <p:sp>
+        <p:nvSpPr>
+          <p:cNvPr id="9" name="Cloud 8">
+            <a:extLst>
+              <a:ext uri="{FF2B5EF4-FFF2-40B4-BE49-F238E27FC236}">
+                <a16:creationId xmlns:a16="http://schemas.microsoft.com/office/drawing/2014/main" id="{C4CE8388-81B7-5452-9F34-5F7588290934}"/>
+              </a:ext>
+            </a:extLst>
+          </p:cNvPr>
+          <p:cNvSpPr/>
+          <p:nvPr/>
+        </p:nvSpPr>
+        <p:spPr>
+          <a:xfrm>
+            <a:off x="6461760" y="4590345"/>
+            <a:ext cx="3431822" cy="1334910"/>
+          </a:xfrm>
+          <a:prstGeom prst="cloud">
+            <a:avLst/>
+          </a:prstGeom>
+        </p:spPr>
+        <p:style>
+          <a:lnRef idx="2">
+            <a:schemeClr val="accent1"/>
+          </a:lnRef>
+          <a:fillRef idx="1">
+            <a:schemeClr val="lt1"/>
+          </a:fillRef>
+          <a:effectRef idx="0">
+            <a:schemeClr val="accent1"/>
+          </a:effectRef>
+          <a:fontRef idx="minor">
+            <a:schemeClr val="dk1"/>
+          </a:fontRef>
+        </p:style>
+        <p:txBody>
+          <a:bodyPr rtlCol="0" anchor="ctr"/>
+          <a:lstStyle/>
+          <a:p>
+            <a:pPr algn="ctr"/>
+            <a:r>
+              <a:rPr lang="en-US" dirty="0"/>
+              <a:t>Accumulate points and use them for your future trips</a:t>
+            </a:r>
+          </a:p>
+        </p:txBody>
+      </p:sp>
+    </p:spTree>
+    <p:extLst>
+      <p:ext uri="{BB962C8B-B14F-4D97-AF65-F5344CB8AC3E}">
+        <p14:creationId xmlns:p14="http://schemas.microsoft.com/office/powerpoint/2010/main" val="4246887344"/>
+      </p:ext>
+    </p:extLst>
+  </p:cSld>
+  <p:clrMapOvr>
+    <a:masterClrMapping/>
+  </p:clrMapOvr>
+</p:sld>
+</file>
+
 <file path=ppt/theme/theme1.xml><?xml version="1.0" encoding="utf-8"?>
 <a:theme xmlns:a="http://schemas.openxmlformats.org/drawingml/2006/main" name="Office Theme">
   <a:themeElements>
